--- a/20261006_サンクスLINE誘導のご提案_業界別ver1.2.pptx
+++ b/20261006_サンクスLINE誘導のご提案_業界別ver1.2.pptx
@@ -318,7 +318,7 @@
           <a:p>
             <a:fld id="{6AF8158D-F6B1-45E0-9831-E70689DC8490}" type="datetimeFigureOut">
               <a:rPr kumimoji="1" lang="ja-JP" altLang="en-US" smtClean="0"/>
-              <a:t>2026/10/5</a:t>
+              <a:t>2026/10/6</a:t>
             </a:fld>
             <a:endParaRPr kumimoji="1" lang="ja-JP" altLang="en-US"/>
           </a:p>
@@ -3255,6 +3255,17 @@
               </a:spcAft>
             </a:pPr>
             <a:r>
+              <a:rPr sz="900" b="0" dirty="0">
+                <a:solidFill>
+                  <a:srgbClr val="7F7F7F"/>
+                </a:solidFill>
+                <a:latin typeface="メイリオ"/>
+                <a:ea typeface="メイリオ"/>
+                <a:cs typeface="メイリオ"/>
+              </a:rPr>
+              <a:t>※</a:t>
+            </a:r>
+            <a:r>
               <a:rPr sz="900" b="0">
                 <a:solidFill>
                   <a:srgbClr val="7F7F7F"/>
@@ -3263,8 +3274,16 @@
                 <a:ea typeface="メイリオ"/>
                 <a:cs typeface="メイリオ"/>
               </a:rPr>
-              <a:t>※誘導可能率・友だち追加率は想定値</a:t>
-            </a:r>
+              <a:t>誘導可能率・友だち追加率は想定値</a:t>
+            </a:r>
+            <a:endParaRPr sz="900" b="0" dirty="0">
+              <a:solidFill>
+                <a:srgbClr val="7F7F7F"/>
+              </a:solidFill>
+              <a:latin typeface="メイリオ"/>
+              <a:ea typeface="メイリオ"/>
+              <a:cs typeface="メイリオ"/>
+            </a:endParaRPr>
           </a:p>
         </p:txBody>
       </p:sp>
@@ -3307,10 +3326,11 @@
           </a:fontRef>
         </p:style>
         <p:txBody>
-          <a:bodyPr rtlCol="0" anchor="ctr" wrap="square" lIns="72000" tIns="18000" rIns="72000" bIns="18000"/>
+          <a:bodyPr wrap="square" lIns="72000" tIns="18000" rIns="72000" bIns="18000" rtlCol="0" anchor="ctr"/>
           <a:lstStyle/>
           <a:p>
             <a:pPr algn="ctr"/>
+            <a:endParaRPr/>
           </a:p>
         </p:txBody>
       </p:sp>
@@ -3331,7 +3351,7 @@
           <a:noFill/>
         </p:spPr>
         <p:txBody>
-          <a:bodyPr wrap="square" anchor="ctr" lIns="36000" rIns="36000" tIns="18000" bIns="18000">
+          <a:bodyPr wrap="square" lIns="36000" tIns="18000" rIns="36000" bIns="18000" anchor="ctr">
             <a:spAutoFit/>
           </a:bodyPr>
           <a:lstStyle/>
@@ -3418,10 +3438,11 @@
           </a:fontRef>
         </p:style>
         <p:txBody>
-          <a:bodyPr rtlCol="0" anchor="ctr" wrap="square" lIns="72000" tIns="18000" rIns="72000" bIns="18000"/>
+          <a:bodyPr wrap="square" lIns="72000" tIns="18000" rIns="72000" bIns="18000" rtlCol="0" anchor="ctr"/>
           <a:lstStyle/>
           <a:p>
             <a:pPr algn="ctr"/>
+            <a:endParaRPr/>
           </a:p>
         </p:txBody>
       </p:sp>
@@ -3442,7 +3463,7 @@
           <a:noFill/>
         </p:spPr>
         <p:txBody>
-          <a:bodyPr wrap="square" anchor="ctr" lIns="36000" rIns="36000" tIns="18000" bIns="18000">
+          <a:bodyPr wrap="square" lIns="36000" tIns="18000" rIns="36000" bIns="18000" anchor="ctr">
             <a:spAutoFit/>
           </a:bodyPr>
           <a:lstStyle/>
@@ -3508,10 +3529,11 @@
           </a:fontRef>
         </p:style>
         <p:txBody>
-          <a:bodyPr rtlCol="0" anchor="ctr" wrap="square" lIns="72000" tIns="18000" rIns="72000" bIns="18000"/>
+          <a:bodyPr wrap="square" lIns="72000" tIns="18000" rIns="72000" bIns="18000" rtlCol="0" anchor="ctr"/>
           <a:lstStyle/>
           <a:p>
             <a:pPr algn="ctr"/>
+            <a:endParaRPr/>
           </a:p>
         </p:txBody>
       </p:sp>
@@ -3532,7 +3554,7 @@
           <a:noFill/>
         </p:spPr>
         <p:txBody>
-          <a:bodyPr wrap="square" anchor="ctr" lIns="36000" rIns="36000" tIns="18000" bIns="18000">
+          <a:bodyPr wrap="square" lIns="36000" tIns="18000" rIns="36000" bIns="18000" anchor="ctr">
             <a:spAutoFit/>
           </a:bodyPr>
           <a:lstStyle/>
@@ -3598,10 +3620,11 @@
           </a:fontRef>
         </p:style>
         <p:txBody>
-          <a:bodyPr rtlCol="0" anchor="ctr" wrap="square" lIns="72000" tIns="18000" rIns="72000" bIns="18000"/>
+          <a:bodyPr wrap="square" lIns="72000" tIns="18000" rIns="72000" bIns="18000" rtlCol="0" anchor="ctr"/>
           <a:lstStyle/>
           <a:p>
             <a:pPr algn="ctr"/>
+            <a:endParaRPr/>
           </a:p>
         </p:txBody>
       </p:sp>
@@ -3622,7 +3645,7 @@
           <a:noFill/>
         </p:spPr>
         <p:txBody>
-          <a:bodyPr wrap="square" anchor="ctr" lIns="36000" rIns="36000" tIns="18000" bIns="18000">
+          <a:bodyPr wrap="square" lIns="36000" tIns="18000" rIns="36000" bIns="18000" anchor="ctr">
             <a:spAutoFit/>
           </a:bodyPr>
           <a:lstStyle/>
@@ -3709,10 +3732,11 @@
           </a:fontRef>
         </p:style>
         <p:txBody>
-          <a:bodyPr rtlCol="0" anchor="ctr" wrap="square" lIns="72000" tIns="18000" rIns="72000" bIns="18000"/>
+          <a:bodyPr wrap="square" lIns="72000" tIns="18000" rIns="72000" bIns="18000" rtlCol="0" anchor="ctr"/>
           <a:lstStyle/>
           <a:p>
             <a:pPr algn="ctr"/>
+            <a:endParaRPr/>
           </a:p>
         </p:txBody>
       </p:sp>
@@ -3733,7 +3757,7 @@
           <a:noFill/>
         </p:spPr>
         <p:txBody>
-          <a:bodyPr wrap="square" anchor="ctr" lIns="36000" rIns="36000" tIns="18000" bIns="18000">
+          <a:bodyPr wrap="square" lIns="36000" tIns="18000" rIns="36000" bIns="18000" anchor="ctr">
             <a:spAutoFit/>
           </a:bodyPr>
           <a:lstStyle/>
@@ -3798,7 +3822,7 @@
           <a:noFill/>
         </p:spPr>
         <p:txBody>
-          <a:bodyPr wrap="square" anchor="t" lIns="36000" rIns="36000" tIns="18000" bIns="18000">
+          <a:bodyPr wrap="square" lIns="36000" tIns="18000" rIns="36000" bIns="18000" anchor="t">
             <a:spAutoFit/>
           </a:bodyPr>
           <a:lstStyle/>
@@ -3988,7 +4012,7 @@
           <a:noFill/>
         </p:spPr>
         <p:txBody>
-          <a:bodyPr wrap="square" anchor="ctr" lIns="36000" rIns="36000" tIns="18000" bIns="18000">
+          <a:bodyPr wrap="square" lIns="36000" tIns="18000" rIns="36000" bIns="18000" anchor="ctr">
             <a:spAutoFit/>
           </a:bodyPr>
           <a:lstStyle/>
@@ -4075,10 +4099,11 @@
           </a:fontRef>
         </p:style>
         <p:txBody>
-          <a:bodyPr rtlCol="0" anchor="ctr" wrap="square" lIns="72000" tIns="18000" rIns="72000" bIns="18000"/>
+          <a:bodyPr wrap="square" lIns="72000" tIns="18000" rIns="72000" bIns="18000" rtlCol="0" anchor="ctr"/>
           <a:lstStyle/>
           <a:p>
             <a:pPr algn="ctr"/>
+            <a:endParaRPr/>
           </a:p>
         </p:txBody>
       </p:sp>
@@ -4099,7 +4124,7 @@
           <a:noFill/>
         </p:spPr>
         <p:txBody>
-          <a:bodyPr wrap="square" anchor="ctr" lIns="36000" rIns="36000" tIns="18000" bIns="18000">
+          <a:bodyPr wrap="square" lIns="36000" tIns="18000" rIns="36000" bIns="18000" anchor="ctr">
             <a:spAutoFit/>
           </a:bodyPr>
           <a:lstStyle/>
@@ -4165,10 +4190,11 @@
           </a:fontRef>
         </p:style>
         <p:txBody>
-          <a:bodyPr rtlCol="0" anchor="ctr" wrap="square" lIns="72000" tIns="18000" rIns="72000" bIns="18000"/>
+          <a:bodyPr wrap="square" lIns="72000" tIns="18000" rIns="72000" bIns="18000" rtlCol="0" anchor="ctr"/>
           <a:lstStyle/>
           <a:p>
             <a:pPr algn="ctr"/>
+            <a:endParaRPr/>
           </a:p>
         </p:txBody>
       </p:sp>
@@ -4189,7 +4215,7 @@
           <a:noFill/>
         </p:spPr>
         <p:txBody>
-          <a:bodyPr wrap="square" anchor="ctr" lIns="36000" rIns="36000" tIns="18000" bIns="18000">
+          <a:bodyPr wrap="square" lIns="36000" tIns="18000" rIns="36000" bIns="18000" anchor="ctr">
             <a:spAutoFit/>
           </a:bodyPr>
           <a:lstStyle/>
@@ -4255,10 +4281,11 @@
           </a:fontRef>
         </p:style>
         <p:txBody>
-          <a:bodyPr rtlCol="0" anchor="ctr" wrap="square" lIns="72000" tIns="18000" rIns="72000" bIns="18000"/>
+          <a:bodyPr wrap="square" lIns="72000" tIns="18000" rIns="72000" bIns="18000" rtlCol="0" anchor="ctr"/>
           <a:lstStyle/>
           <a:p>
             <a:pPr algn="ctr"/>
+            <a:endParaRPr/>
           </a:p>
         </p:txBody>
       </p:sp>
@@ -4279,7 +4306,7 @@
           <a:noFill/>
         </p:spPr>
         <p:txBody>
-          <a:bodyPr wrap="square" anchor="ctr" lIns="36000" rIns="36000" tIns="18000" bIns="18000">
+          <a:bodyPr wrap="square" lIns="36000" tIns="18000" rIns="36000" bIns="18000" anchor="ctr">
             <a:spAutoFit/>
           </a:bodyPr>
           <a:lstStyle/>
@@ -4358,7 +4385,7 @@
           <a:noFill/>
         </p:spPr>
         <p:txBody>
-          <a:bodyPr wrap="square" anchor="ctr" lIns="36000" rIns="36000" tIns="18000" bIns="18000">
+          <a:bodyPr wrap="square" lIns="36000" tIns="18000" rIns="36000" bIns="18000" anchor="ctr">
             <a:spAutoFit/>
           </a:bodyPr>
           <a:lstStyle/>
@@ -4445,10 +4472,11 @@
           </a:fontRef>
         </p:style>
         <p:txBody>
-          <a:bodyPr rtlCol="0" anchor="ctr" wrap="square" lIns="72000" tIns="18000" rIns="72000" bIns="18000"/>
+          <a:bodyPr wrap="square" lIns="72000" tIns="18000" rIns="72000" bIns="18000" rtlCol="0" anchor="ctr"/>
           <a:lstStyle/>
           <a:p>
             <a:pPr algn="ctr"/>
+            <a:endParaRPr/>
           </a:p>
         </p:txBody>
       </p:sp>
@@ -4469,7 +4497,7 @@
           <a:noFill/>
         </p:spPr>
         <p:txBody>
-          <a:bodyPr wrap="square" anchor="ctr" lIns="36000" rIns="36000" tIns="18000" bIns="18000">
+          <a:bodyPr wrap="square" lIns="36000" tIns="18000" rIns="36000" bIns="18000" anchor="ctr">
             <a:spAutoFit/>
           </a:bodyPr>
           <a:lstStyle/>
@@ -4535,10 +4563,11 @@
           </a:fontRef>
         </p:style>
         <p:txBody>
-          <a:bodyPr rtlCol="0" anchor="ctr" wrap="square" lIns="72000" tIns="18000" rIns="72000" bIns="18000"/>
+          <a:bodyPr wrap="square" lIns="72000" tIns="18000" rIns="72000" bIns="18000" rtlCol="0" anchor="ctr"/>
           <a:lstStyle/>
           <a:p>
             <a:pPr algn="ctr"/>
+            <a:endParaRPr/>
           </a:p>
         </p:txBody>
       </p:sp>
@@ -4559,7 +4588,7 @@
           <a:noFill/>
         </p:spPr>
         <p:txBody>
-          <a:bodyPr wrap="square" anchor="ctr" lIns="36000" rIns="36000" tIns="18000" bIns="18000">
+          <a:bodyPr wrap="square" lIns="36000" tIns="18000" rIns="36000" bIns="18000" anchor="ctr">
             <a:spAutoFit/>
           </a:bodyPr>
           <a:lstStyle/>
@@ -4625,10 +4654,11 @@
           </a:fontRef>
         </p:style>
         <p:txBody>
-          <a:bodyPr rtlCol="0" anchor="ctr" wrap="square" lIns="72000" tIns="18000" rIns="72000" bIns="18000"/>
+          <a:bodyPr wrap="square" lIns="72000" tIns="18000" rIns="72000" bIns="18000" rtlCol="0" anchor="ctr"/>
           <a:lstStyle/>
           <a:p>
             <a:pPr algn="ctr"/>
+            <a:endParaRPr/>
           </a:p>
         </p:txBody>
       </p:sp>
@@ -4649,7 +4679,7 @@
           <a:noFill/>
         </p:spPr>
         <p:txBody>
-          <a:bodyPr wrap="square" anchor="ctr" lIns="36000" rIns="36000" tIns="18000" bIns="18000">
+          <a:bodyPr wrap="square" lIns="36000" tIns="18000" rIns="36000" bIns="18000" anchor="ctr">
             <a:spAutoFit/>
           </a:bodyPr>
           <a:lstStyle/>
@@ -4736,10 +4766,11 @@
           </a:fontRef>
         </p:style>
         <p:txBody>
-          <a:bodyPr rtlCol="0" anchor="ctr" wrap="square" lIns="72000" tIns="18000" rIns="72000" bIns="18000"/>
+          <a:bodyPr wrap="square" lIns="72000" tIns="18000" rIns="72000" bIns="18000" rtlCol="0" anchor="ctr"/>
           <a:lstStyle/>
           <a:p>
             <a:pPr algn="ctr"/>
+            <a:endParaRPr/>
           </a:p>
         </p:txBody>
       </p:sp>
@@ -4760,7 +4791,7 @@
           <a:noFill/>
         </p:spPr>
         <p:txBody>
-          <a:bodyPr wrap="square" anchor="ctr" lIns="36000" rIns="36000" tIns="18000" bIns="18000">
+          <a:bodyPr wrap="square" lIns="36000" tIns="18000" rIns="36000" bIns="18000" anchor="ctr">
             <a:spAutoFit/>
           </a:bodyPr>
           <a:lstStyle/>
@@ -4804,50 +4835,6 @@
                 <a:cs typeface="メイリオ"/>
               </a:rPr>
               <a:t>継続接点</a:t>
-            </a:r>
-          </a:p>
-        </p:txBody>
-      </p:sp>
-      <p:sp>
-        <p:nvSpPr>
-          <p:cNvPr id="23" name="TextBox 22"/>
-          <p:cNvSpPr txBox="1"/>
-          <p:nvPr/>
-        </p:nvSpPr>
-        <p:spPr>
-          <a:xfrm>
-            <a:off x="9094500" y="4896000"/>
-            <a:ext cx="2305500" cy="324000"/>
-          </a:xfrm>
-          <a:prstGeom prst="rect">
-            <a:avLst/>
-          </a:prstGeom>
-          <a:noFill/>
-        </p:spPr>
-        <p:txBody>
-          <a:bodyPr wrap="square" anchor="t" lIns="36000" rIns="36000" tIns="18000" bIns="18000">
-            <a:spAutoFit/>
-          </a:bodyPr>
-          <a:lstStyle/>
-          <a:p>
-            <a:pPr algn="ctr">
-              <a:lnSpc>
-                <a:spcPct val="110000"/>
-              </a:lnSpc>
-              <a:spcAft>
-                <a:spcPts val="0"/>
-              </a:spcAft>
-            </a:pPr>
-            <a:r>
-              <a:rPr sz="1000" b="0">
-                <a:solidFill>
-                  <a:srgbClr val="7F7F7F"/>
-                </a:solidFill>
-                <a:latin typeface="メイリオ"/>
-                <a:ea typeface="メイリオ"/>
-                <a:cs typeface="メイリオ"/>
-              </a:rPr>
-              <a:t>その後のご案内・やり取りができる</a:t>
             </a:r>
           </a:p>
         </p:txBody>
@@ -5129,7 +5116,7 @@
           </a:fontRef>
         </p:style>
         <p:txBody>
-          <a:bodyPr rtlCol="0" anchor="ctr" wrap="square" lIns="0" tIns="0" rIns="0" bIns="0"/>
+          <a:bodyPr wrap="square" lIns="0" tIns="0" rIns="0" bIns="0" rtlCol="0" anchor="ctr"/>
           <a:lstStyle/>
           <a:p>
             <a:pPr algn="ctr">
@@ -5171,7 +5158,7 @@
           <a:noFill/>
         </p:spPr>
         <p:txBody>
-          <a:bodyPr wrap="square" anchor="ctr" lIns="36000" rIns="36000" tIns="18000" bIns="18000">
+          <a:bodyPr wrap="square" lIns="36000" tIns="18000" rIns="36000" bIns="18000" anchor="ctr">
             <a:spAutoFit/>
           </a:bodyPr>
           <a:lstStyle/>
@@ -5237,7 +5224,7 @@
           </a:fontRef>
         </p:style>
         <p:txBody>
-          <a:bodyPr rtlCol="0" anchor="ctr" wrap="square" lIns="36000" tIns="0" rIns="36000" bIns="0"/>
+          <a:bodyPr wrap="square" lIns="36000" tIns="0" rIns="36000" bIns="0" rtlCol="0" anchor="ctr"/>
           <a:lstStyle/>
           <a:p>
             <a:pPr algn="ctr">
@@ -5356,7 +5343,7 @@
           </a:fontRef>
         </p:style>
         <p:txBody>
-          <a:bodyPr rtlCol="0" anchor="ctr" wrap="square" lIns="0" tIns="0" rIns="0" bIns="0"/>
+          <a:bodyPr wrap="square" lIns="0" tIns="0" rIns="0" bIns="0" rtlCol="0" anchor="ctr"/>
           <a:lstStyle/>
           <a:p>
             <a:pPr algn="ctr">
@@ -5434,7 +5421,7 @@
           <a:noFill/>
         </p:spPr>
         <p:txBody>
-          <a:bodyPr wrap="square" anchor="t" lIns="36000" rIns="36000" tIns="18000" bIns="18000">
+          <a:bodyPr wrap="square" lIns="36000" tIns="18000" rIns="36000" bIns="18000" anchor="t">
             <a:spAutoFit/>
           </a:bodyPr>
           <a:lstStyle/>
@@ -5478,7 +5465,7 @@
           <a:noFill/>
         </p:spPr>
         <p:txBody>
-          <a:bodyPr wrap="square" anchor="t" lIns="36000" rIns="36000" tIns="18000" bIns="18000">
+          <a:bodyPr wrap="square" lIns="36000" tIns="18000" rIns="36000" bIns="18000" anchor="t">
             <a:spAutoFit/>
           </a:bodyPr>
           <a:lstStyle/>
@@ -5566,7 +5553,7 @@
           </a:fontRef>
         </p:style>
         <p:txBody>
-          <a:bodyPr rtlCol="0" anchor="ctr" wrap="square" lIns="0" tIns="0" rIns="0" bIns="0"/>
+          <a:bodyPr wrap="square" lIns="0" tIns="0" rIns="0" bIns="0" rtlCol="0" anchor="ctr"/>
           <a:lstStyle/>
           <a:p>
             <a:pPr algn="ctr">
@@ -5608,7 +5595,7 @@
           <a:noFill/>
         </p:spPr>
         <p:txBody>
-          <a:bodyPr wrap="square" anchor="ctr" lIns="36000" rIns="36000" tIns="18000" bIns="18000">
+          <a:bodyPr wrap="square" lIns="36000" tIns="18000" rIns="36000" bIns="18000" anchor="ctr">
             <a:spAutoFit/>
           </a:bodyPr>
           <a:lstStyle/>
@@ -5674,7 +5661,7 @@
           </a:fontRef>
         </p:style>
         <p:txBody>
-          <a:bodyPr rtlCol="0" anchor="ctr" wrap="square" lIns="36000" tIns="0" rIns="36000" bIns="0"/>
+          <a:bodyPr wrap="square" lIns="36000" tIns="0" rIns="36000" bIns="0" rtlCol="0" anchor="ctr"/>
           <a:lstStyle/>
           <a:p>
             <a:pPr algn="ctr">
@@ -5793,7 +5780,7 @@
           </a:fontRef>
         </p:style>
         <p:txBody>
-          <a:bodyPr rtlCol="0" anchor="ctr" wrap="square" lIns="0" tIns="0" rIns="0" bIns="0"/>
+          <a:bodyPr wrap="square" lIns="0" tIns="0" rIns="0" bIns="0" rtlCol="0" anchor="ctr"/>
           <a:lstStyle/>
           <a:p>
             <a:pPr algn="ctr">
@@ -5871,7 +5858,7 @@
           <a:noFill/>
         </p:spPr>
         <p:txBody>
-          <a:bodyPr wrap="square" anchor="t" lIns="36000" rIns="36000" tIns="18000" bIns="18000">
+          <a:bodyPr wrap="square" lIns="36000" tIns="18000" rIns="36000" bIns="18000" anchor="t">
             <a:spAutoFit/>
           </a:bodyPr>
           <a:lstStyle/>
@@ -5915,7 +5902,7 @@
           <a:noFill/>
         </p:spPr>
         <p:txBody>
-          <a:bodyPr wrap="square" anchor="t" lIns="36000" rIns="36000" tIns="18000" bIns="18000">
+          <a:bodyPr wrap="square" lIns="36000" tIns="18000" rIns="36000" bIns="18000" anchor="t">
             <a:spAutoFit/>
           </a:bodyPr>
           <a:lstStyle/>
@@ -6003,7 +5990,7 @@
           </a:fontRef>
         </p:style>
         <p:txBody>
-          <a:bodyPr rtlCol="0" anchor="ctr" wrap="square" lIns="0" tIns="0" rIns="0" bIns="0"/>
+          <a:bodyPr wrap="square" lIns="0" tIns="0" rIns="0" bIns="0" rtlCol="0" anchor="ctr"/>
           <a:lstStyle/>
           <a:p>
             <a:pPr algn="ctr">
@@ -6045,7 +6032,7 @@
           <a:noFill/>
         </p:spPr>
         <p:txBody>
-          <a:bodyPr wrap="square" anchor="ctr" lIns="36000" rIns="36000" tIns="18000" bIns="18000">
+          <a:bodyPr wrap="square" lIns="36000" tIns="18000" rIns="36000" bIns="18000" anchor="ctr">
             <a:spAutoFit/>
           </a:bodyPr>
           <a:lstStyle/>
@@ -6111,7 +6098,7 @@
           </a:fontRef>
         </p:style>
         <p:txBody>
-          <a:bodyPr rtlCol="0" anchor="ctr" wrap="square" lIns="36000" tIns="0" rIns="36000" bIns="0"/>
+          <a:bodyPr wrap="square" lIns="36000" tIns="0" rIns="36000" bIns="0" rtlCol="0" anchor="ctr"/>
           <a:lstStyle/>
           <a:p>
             <a:pPr algn="ctr">
@@ -6230,7 +6217,7 @@
           </a:fontRef>
         </p:style>
         <p:txBody>
-          <a:bodyPr rtlCol="0" anchor="ctr" wrap="square" lIns="0" tIns="0" rIns="0" bIns="0"/>
+          <a:bodyPr wrap="square" lIns="0" tIns="0" rIns="0" bIns="0" rtlCol="0" anchor="ctr"/>
           <a:lstStyle/>
           <a:p>
             <a:pPr algn="ctr">
@@ -6308,7 +6295,7 @@
           <a:noFill/>
         </p:spPr>
         <p:txBody>
-          <a:bodyPr wrap="square" anchor="t" lIns="36000" rIns="36000" tIns="18000" bIns="18000">
+          <a:bodyPr wrap="square" lIns="36000" tIns="18000" rIns="36000" bIns="18000" anchor="t">
             <a:spAutoFit/>
           </a:bodyPr>
           <a:lstStyle/>
@@ -6352,7 +6339,7 @@
           <a:noFill/>
         </p:spPr>
         <p:txBody>
-          <a:bodyPr wrap="square" anchor="t" lIns="36000" rIns="36000" tIns="18000" bIns="18000">
+          <a:bodyPr wrap="square" lIns="36000" tIns="18000" rIns="36000" bIns="18000" anchor="t">
             <a:spAutoFit/>
           </a:bodyPr>
           <a:lstStyle/>
@@ -6440,7 +6427,7 @@
           </a:fontRef>
         </p:style>
         <p:txBody>
-          <a:bodyPr rtlCol="0" anchor="ctr" wrap="square" lIns="0" tIns="0" rIns="0" bIns="0"/>
+          <a:bodyPr wrap="square" lIns="0" tIns="0" rIns="0" bIns="0" rtlCol="0" anchor="ctr"/>
           <a:lstStyle/>
           <a:p>
             <a:pPr algn="ctr">
@@ -6482,7 +6469,7 @@
           <a:noFill/>
         </p:spPr>
         <p:txBody>
-          <a:bodyPr wrap="square" anchor="ctr" lIns="36000" rIns="36000" tIns="18000" bIns="18000">
+          <a:bodyPr wrap="square" lIns="36000" tIns="18000" rIns="36000" bIns="18000" anchor="ctr">
             <a:spAutoFit/>
           </a:bodyPr>
           <a:lstStyle/>
@@ -6548,7 +6535,7 @@
           </a:fontRef>
         </p:style>
         <p:txBody>
-          <a:bodyPr rtlCol="0" anchor="ctr" wrap="square" lIns="36000" tIns="0" rIns="36000" bIns="0"/>
+          <a:bodyPr wrap="square" lIns="36000" tIns="0" rIns="36000" bIns="0" rtlCol="0" anchor="ctr"/>
           <a:lstStyle/>
           <a:p>
             <a:pPr algn="ctr">
@@ -6667,7 +6654,7 @@
           </a:fontRef>
         </p:style>
         <p:txBody>
-          <a:bodyPr rtlCol="0" anchor="ctr" wrap="square" lIns="0" tIns="0" rIns="0" bIns="0"/>
+          <a:bodyPr wrap="square" lIns="0" tIns="0" rIns="0" bIns="0" rtlCol="0" anchor="ctr"/>
           <a:lstStyle/>
           <a:p>
             <a:pPr algn="ctr">
@@ -6745,7 +6732,7 @@
           <a:noFill/>
         </p:spPr>
         <p:txBody>
-          <a:bodyPr wrap="square" anchor="t" lIns="36000" rIns="36000" tIns="18000" bIns="18000">
+          <a:bodyPr wrap="square" lIns="36000" tIns="18000" rIns="36000" bIns="18000" anchor="t">
             <a:spAutoFit/>
           </a:bodyPr>
           <a:lstStyle/>
@@ -6789,7 +6776,7 @@
           <a:noFill/>
         </p:spPr>
         <p:txBody>
-          <a:bodyPr wrap="square" anchor="t" lIns="36000" rIns="36000" tIns="18000" bIns="18000">
+          <a:bodyPr wrap="square" lIns="36000" tIns="18000" rIns="36000" bIns="18000" anchor="t">
             <a:spAutoFit/>
           </a:bodyPr>
           <a:lstStyle/>
@@ -6812,50 +6799,6 @@
                 <a:cs typeface="メイリオ"/>
               </a:rPr>
               <a:t>見学会の案内／土地情報／個別相談</a:t>
-            </a:r>
-          </a:p>
-        </p:txBody>
-      </p:sp>
-      <p:sp>
-        <p:nvSpPr>
-          <p:cNvPr id="44" name="TextBox 43"/>
-          <p:cNvSpPr txBox="1"/>
-          <p:nvPr/>
-        </p:nvSpPr>
-        <p:spPr>
-          <a:xfrm>
-            <a:off x="792000" y="6318000"/>
-            <a:ext cx="10608000" cy="180000"/>
-          </a:xfrm>
-          <a:prstGeom prst="rect">
-            <a:avLst/>
-          </a:prstGeom>
-          <a:noFill/>
-        </p:spPr>
-        <p:txBody>
-          <a:bodyPr wrap="square" anchor="t" lIns="36000" rIns="36000" tIns="18000" bIns="18000">
-            <a:spAutoFit/>
-          </a:bodyPr>
-          <a:lstStyle/>
-          <a:p>
-            <a:pPr algn="l">
-              <a:lnSpc>
-                <a:spcPct val="110000"/>
-              </a:lnSpc>
-              <a:spcAft>
-                <a:spcPts val="0"/>
-              </a:spcAft>
-            </a:pPr>
-            <a:r>
-              <a:rPr sz="900" b="0">
-                <a:solidFill>
-                  <a:srgbClr val="7F7F7F"/>
-                </a:solidFill>
-                <a:latin typeface="メイリオ"/>
-                <a:ea typeface="メイリオ"/>
-                <a:cs typeface="メイリオ"/>
-              </a:rPr>
-              <a:t>※利用シーンは想定例</a:t>
             </a:r>
           </a:p>
         </p:txBody>
@@ -7058,7 +7001,7 @@
           <a:noFill/>
         </p:spPr>
         <p:txBody>
-          <a:bodyPr wrap="square" anchor="ctr" lIns="36000" rIns="36000" tIns="18000" bIns="18000">
+          <a:bodyPr wrap="square" lIns="36000" tIns="18000" rIns="36000" bIns="18000" anchor="ctr">
             <a:spAutoFit/>
           </a:bodyPr>
           <a:lstStyle/>
@@ -7124,10 +7067,11 @@
           </a:fontRef>
         </p:style>
         <p:txBody>
-          <a:bodyPr rtlCol="0" anchor="ctr" wrap="square" lIns="72000" tIns="18000" rIns="72000" bIns="18000"/>
+          <a:bodyPr wrap="square" lIns="72000" tIns="18000" rIns="72000" bIns="18000" rtlCol="0" anchor="ctr"/>
           <a:lstStyle/>
           <a:p>
             <a:pPr algn="ctr"/>
+            <a:endParaRPr/>
           </a:p>
         </p:txBody>
       </p:sp>
@@ -7148,7 +7092,7 @@
           <a:noFill/>
         </p:spPr>
         <p:txBody>
-          <a:bodyPr wrap="square" anchor="ctr" lIns="36000" rIns="36000" tIns="18000" bIns="18000">
+          <a:bodyPr wrap="square" lIns="36000" tIns="18000" rIns="36000" bIns="18000" anchor="ctr">
             <a:spAutoFit/>
           </a:bodyPr>
           <a:lstStyle/>
@@ -7235,10 +7179,11 @@
           </a:fontRef>
         </p:style>
         <p:txBody>
-          <a:bodyPr rtlCol="0" anchor="ctr" wrap="square" lIns="72000" tIns="18000" rIns="72000" bIns="18000"/>
+          <a:bodyPr wrap="square" lIns="72000" tIns="18000" rIns="72000" bIns="18000" rtlCol="0" anchor="ctr"/>
           <a:lstStyle/>
           <a:p>
             <a:pPr algn="ctr"/>
+            <a:endParaRPr/>
           </a:p>
         </p:txBody>
       </p:sp>
@@ -7259,7 +7204,7 @@
           <a:noFill/>
         </p:spPr>
         <p:txBody>
-          <a:bodyPr wrap="square" anchor="ctr" lIns="36000" rIns="36000" tIns="18000" bIns="18000">
+          <a:bodyPr wrap="square" lIns="36000" tIns="18000" rIns="36000" bIns="18000" anchor="ctr">
             <a:spAutoFit/>
           </a:bodyPr>
           <a:lstStyle/>
@@ -7346,10 +7291,11 @@
           </a:fontRef>
         </p:style>
         <p:txBody>
-          <a:bodyPr rtlCol="0" anchor="ctr" wrap="square" lIns="72000" tIns="18000" rIns="72000" bIns="18000"/>
+          <a:bodyPr wrap="square" lIns="72000" tIns="18000" rIns="72000" bIns="18000" rtlCol="0" anchor="ctr"/>
           <a:lstStyle/>
           <a:p>
             <a:pPr algn="ctr"/>
+            <a:endParaRPr/>
           </a:p>
         </p:txBody>
       </p:sp>
@@ -7370,7 +7316,7 @@
           <a:noFill/>
         </p:spPr>
         <p:txBody>
-          <a:bodyPr wrap="square" anchor="ctr" lIns="36000" rIns="36000" tIns="18000" bIns="18000">
+          <a:bodyPr wrap="square" lIns="36000" tIns="18000" rIns="36000" bIns="18000" anchor="ctr">
             <a:spAutoFit/>
           </a:bodyPr>
           <a:lstStyle/>
@@ -7435,7 +7381,7 @@
           <a:noFill/>
         </p:spPr>
         <p:txBody>
-          <a:bodyPr wrap="square" anchor="t" lIns="36000" rIns="36000" tIns="18000" bIns="18000">
+          <a:bodyPr wrap="square" lIns="36000" tIns="18000" rIns="36000" bIns="18000" anchor="t">
             <a:spAutoFit/>
           </a:bodyPr>
           <a:lstStyle/>
@@ -7479,7 +7425,7 @@
           <a:noFill/>
         </p:spPr>
         <p:txBody>
-          <a:bodyPr wrap="square" anchor="ctr" lIns="36000" rIns="36000" tIns="18000" bIns="18000">
+          <a:bodyPr wrap="square" lIns="36000" tIns="18000" rIns="36000" bIns="18000" anchor="ctr">
             <a:spAutoFit/>
           </a:bodyPr>
           <a:lstStyle/>
@@ -7523,7 +7469,7 @@
           <a:noFill/>
         </p:spPr>
         <p:txBody>
-          <a:bodyPr wrap="square" anchor="ctr" lIns="36000" rIns="36000" tIns="18000" bIns="18000">
+          <a:bodyPr wrap="square" lIns="36000" tIns="18000" rIns="36000" bIns="18000" anchor="ctr">
             <a:spAutoFit/>
           </a:bodyPr>
           <a:lstStyle/>
@@ -7559,7 +7505,7 @@
         <p:spPr>
           <a:xfrm>
             <a:off x="792000" y="4680000"/>
-            <a:ext cx="5088000" cy="576000"/>
+            <a:ext cx="5088000" cy="468265"/>
           </a:xfrm>
           <a:prstGeom prst="rect">
             <a:avLst/>
@@ -7567,7 +7513,7 @@
           <a:noFill/>
         </p:spPr>
         <p:txBody>
-          <a:bodyPr wrap="square" anchor="t" lIns="36000" rIns="36000" tIns="18000" bIns="18000">
+          <a:bodyPr wrap="square" lIns="36000" tIns="18000" rIns="36000" bIns="18000" anchor="t">
             <a:spAutoFit/>
           </a:bodyPr>
           <a:lstStyle/>
@@ -7581,7 +7527,7 @@
               </a:spcAft>
             </a:pPr>
             <a:r>
-              <a:rPr sz="1100" b="0">
+              <a:rPr sz="1200" b="0" dirty="0">
                 <a:solidFill>
                   <a:srgbClr val="333333"/>
                 </a:solidFill>
@@ -7602,7 +7548,7 @@
               </a:spcAft>
             </a:pPr>
             <a:r>
-              <a:rPr sz="1100" b="0">
+              <a:rPr sz="1200" b="0" dirty="0" err="1">
                 <a:solidFill>
                   <a:srgbClr val="333333"/>
                 </a:solidFill>
@@ -7612,6 +7558,14 @@
               </a:rPr>
               <a:t>予約忘れ・乗車前の問い合わせも減少</a:t>
             </a:r>
+            <a:endParaRPr sz="1200" b="0" dirty="0">
+              <a:solidFill>
+                <a:srgbClr val="333333"/>
+              </a:solidFill>
+              <a:latin typeface="メイリオ"/>
+              <a:ea typeface="メイリオ"/>
+              <a:cs typeface="メイリオ"/>
+            </a:endParaRPr>
           </a:p>
         </p:txBody>
       </p:sp>
@@ -7632,7 +7586,7 @@
           <a:noFill/>
         </p:spPr>
         <p:txBody>
-          <a:bodyPr wrap="square" anchor="t" lIns="36000" rIns="36000" tIns="18000" bIns="18000">
+          <a:bodyPr wrap="square" lIns="36000" tIns="18000" rIns="36000" bIns="18000" anchor="t">
             <a:spAutoFit/>
           </a:bodyPr>
           <a:lstStyle/>
@@ -7676,7 +7630,7 @@
           <a:noFill/>
         </p:spPr>
         <p:txBody>
-          <a:bodyPr wrap="square" anchor="ctr" lIns="36000" rIns="36000" tIns="18000" bIns="18000">
+          <a:bodyPr wrap="square" lIns="36000" tIns="18000" rIns="36000" bIns="18000" anchor="ctr">
             <a:spAutoFit/>
           </a:bodyPr>
           <a:lstStyle/>
@@ -7742,10 +7696,11 @@
           </a:fontRef>
         </p:style>
         <p:txBody>
-          <a:bodyPr rtlCol="0" anchor="ctr" wrap="square" lIns="72000" tIns="18000" rIns="72000" bIns="18000"/>
+          <a:bodyPr wrap="square" lIns="72000" tIns="18000" rIns="72000" bIns="18000" rtlCol="0" anchor="ctr"/>
           <a:lstStyle/>
           <a:p>
             <a:pPr algn="ctr"/>
+            <a:endParaRPr/>
           </a:p>
         </p:txBody>
       </p:sp>
@@ -7766,7 +7721,7 @@
           <a:noFill/>
         </p:spPr>
         <p:txBody>
-          <a:bodyPr wrap="square" anchor="ctr" lIns="36000" rIns="36000" tIns="18000" bIns="18000">
+          <a:bodyPr wrap="square" lIns="36000" tIns="18000" rIns="36000" bIns="18000" anchor="ctr">
             <a:spAutoFit/>
           </a:bodyPr>
           <a:lstStyle/>
@@ -7853,10 +7808,11 @@
           </a:fontRef>
         </p:style>
         <p:txBody>
-          <a:bodyPr rtlCol="0" anchor="ctr" wrap="square" lIns="72000" tIns="18000" rIns="72000" bIns="18000"/>
+          <a:bodyPr wrap="square" lIns="72000" tIns="18000" rIns="72000" bIns="18000" rtlCol="0" anchor="ctr"/>
           <a:lstStyle/>
           <a:p>
             <a:pPr algn="ctr"/>
+            <a:endParaRPr/>
           </a:p>
         </p:txBody>
       </p:sp>
@@ -7877,7 +7833,7 @@
           <a:noFill/>
         </p:spPr>
         <p:txBody>
-          <a:bodyPr wrap="square" anchor="ctr" lIns="36000" rIns="36000" tIns="18000" bIns="18000">
+          <a:bodyPr wrap="square" lIns="36000" tIns="18000" rIns="36000" bIns="18000" anchor="ctr">
             <a:spAutoFit/>
           </a:bodyPr>
           <a:lstStyle/>
@@ -7964,10 +7920,11 @@
           </a:fontRef>
         </p:style>
         <p:txBody>
-          <a:bodyPr rtlCol="0" anchor="ctr" wrap="square" lIns="72000" tIns="18000" rIns="72000" bIns="18000"/>
+          <a:bodyPr wrap="square" lIns="72000" tIns="18000" rIns="72000" bIns="18000" rtlCol="0" anchor="ctr"/>
           <a:lstStyle/>
           <a:p>
             <a:pPr algn="ctr"/>
+            <a:endParaRPr/>
           </a:p>
         </p:txBody>
       </p:sp>
@@ -7988,7 +7945,7 @@
           <a:noFill/>
         </p:spPr>
         <p:txBody>
-          <a:bodyPr wrap="square" anchor="ctr" lIns="36000" rIns="36000" tIns="18000" bIns="18000">
+          <a:bodyPr wrap="square" lIns="36000" tIns="18000" rIns="36000" bIns="18000" anchor="ctr">
             <a:spAutoFit/>
           </a:bodyPr>
           <a:lstStyle/>
@@ -8032,7 +7989,7 @@
           <a:noFill/>
         </p:spPr>
         <p:txBody>
-          <a:bodyPr wrap="square" anchor="t" lIns="36000" rIns="36000" tIns="18000" bIns="18000">
+          <a:bodyPr wrap="square" lIns="36000" tIns="18000" rIns="36000" bIns="18000" anchor="t">
             <a:spAutoFit/>
           </a:bodyPr>
           <a:lstStyle/>
@@ -8076,7 +8033,7 @@
           <a:noFill/>
         </p:spPr>
         <p:txBody>
-          <a:bodyPr wrap="square" anchor="ctr" lIns="36000" rIns="36000" tIns="18000" bIns="18000">
+          <a:bodyPr wrap="square" lIns="36000" tIns="18000" rIns="36000" bIns="18000" anchor="ctr">
             <a:spAutoFit/>
           </a:bodyPr>
           <a:lstStyle/>
@@ -8120,7 +8077,7 @@
           <a:noFill/>
         </p:spPr>
         <p:txBody>
-          <a:bodyPr wrap="square" anchor="ctr" lIns="36000" rIns="36000" tIns="18000" bIns="18000">
+          <a:bodyPr wrap="square" lIns="36000" tIns="18000" rIns="36000" bIns="18000" anchor="ctr">
             <a:spAutoFit/>
           </a:bodyPr>
           <a:lstStyle/>
@@ -8156,7 +8113,7 @@
         <p:spPr>
           <a:xfrm>
             <a:off x="6312000" y="4680000"/>
-            <a:ext cx="5088000" cy="576000"/>
+            <a:ext cx="5088000" cy="468265"/>
           </a:xfrm>
           <a:prstGeom prst="rect">
             <a:avLst/>
@@ -8164,7 +8121,7 @@
           <a:noFill/>
         </p:spPr>
         <p:txBody>
-          <a:bodyPr wrap="square" anchor="t" lIns="36000" rIns="36000" tIns="18000" bIns="18000">
+          <a:bodyPr wrap="square" lIns="36000" tIns="18000" rIns="36000" bIns="18000" anchor="t">
             <a:spAutoFit/>
           </a:bodyPr>
           <a:lstStyle/>
@@ -8178,7 +8135,7 @@
               </a:spcAft>
             </a:pPr>
             <a:r>
-              <a:rPr sz="1100" b="0">
+              <a:rPr sz="1200" b="0" dirty="0" err="1">
                 <a:solidFill>
                   <a:srgbClr val="333333"/>
                 </a:solidFill>
@@ -8188,6 +8145,14 @@
               </a:rPr>
               <a:t>ステップ配信の実施前との比較</a:t>
             </a:r>
+            <a:endParaRPr sz="1200" b="0" dirty="0">
+              <a:solidFill>
+                <a:srgbClr val="333333"/>
+              </a:solidFill>
+              <a:latin typeface="メイリオ"/>
+              <a:ea typeface="メイリオ"/>
+              <a:cs typeface="メイリオ"/>
+            </a:endParaRPr>
           </a:p>
           <a:p>
             <a:pPr algn="ctr">
@@ -8199,7 +8164,7 @@
               </a:spcAft>
             </a:pPr>
             <a:r>
-              <a:rPr sz="1100" b="0">
+              <a:rPr sz="1200" b="0" dirty="0" err="1">
                 <a:solidFill>
                   <a:srgbClr val="333333"/>
                 </a:solidFill>
@@ -8209,6 +8174,14 @@
               </a:rPr>
               <a:t>友だち追加広告による友だち数の増加も含む</a:t>
             </a:r>
+            <a:endParaRPr sz="1200" b="0" dirty="0">
+              <a:solidFill>
+                <a:srgbClr val="333333"/>
+              </a:solidFill>
+              <a:latin typeface="メイリオ"/>
+              <a:ea typeface="メイリオ"/>
+              <a:cs typeface="メイリオ"/>
+            </a:endParaRPr>
           </a:p>
         </p:txBody>
       </p:sp>
@@ -8229,7 +8202,7 @@
           <a:noFill/>
         </p:spPr>
         <p:txBody>
-          <a:bodyPr wrap="square" anchor="t" lIns="36000" rIns="36000" tIns="18000" bIns="18000">
+          <a:bodyPr wrap="square" lIns="36000" tIns="18000" rIns="36000" bIns="18000" anchor="t">
             <a:spAutoFit/>
           </a:bodyPr>
           <a:lstStyle/>
@@ -8252,50 +8225,6 @@
                 <a:cs typeface="メイリオ"/>
               </a:rPr>
               <a:t>出典：LINEヤフー for Business 導入事例（アクネクリニック／2022年4月公開・取材先調べ）</a:t>
-            </a:r>
-          </a:p>
-        </p:txBody>
-      </p:sp>
-      <p:sp>
-        <p:nvSpPr>
-          <p:cNvPr id="31" name="TextBox 30"/>
-          <p:cNvSpPr txBox="1"/>
-          <p:nvPr/>
-        </p:nvSpPr>
-        <p:spPr>
-          <a:xfrm>
-            <a:off x="792000" y="6192000"/>
-            <a:ext cx="10608000" cy="216000"/>
-          </a:xfrm>
-          <a:prstGeom prst="rect">
-            <a:avLst/>
-          </a:prstGeom>
-          <a:noFill/>
-        </p:spPr>
-        <p:txBody>
-          <a:bodyPr wrap="square" anchor="t" lIns="36000" rIns="36000" tIns="18000" bIns="18000">
-            <a:spAutoFit/>
-          </a:bodyPr>
-          <a:lstStyle/>
-          <a:p>
-            <a:pPr algn="l">
-              <a:lnSpc>
-                <a:spcPct val="110000"/>
-              </a:lnSpc>
-              <a:spcAft>
-                <a:spcPts val="0"/>
-              </a:spcAft>
-            </a:pPr>
-            <a:r>
-              <a:rPr sz="900" b="0">
-                <a:solidFill>
-                  <a:srgbClr val="7F7F7F"/>
-                </a:solidFill>
-                <a:latin typeface="メイリオ"/>
-                <a:ea typeface="メイリオ"/>
-                <a:cs typeface="メイリオ"/>
-              </a:rPr>
-              <a:t>※どちらもサンクスLINE誘導そのものではなく、LINEでつながった後の活用事例</a:t>
             </a:r>
           </a:p>
         </p:txBody>
@@ -8454,7 +8383,7 @@
             <a:avLst/>
           </a:prstGeom>
           <a:solidFill>
-            <a:srgbClr val="EE7800"/>
+            <a:srgbClr val="F59B21"/>
           </a:solidFill>
           <a:ln>
             <a:noFill/>
@@ -8516,7 +8445,7 @@
             <a:r>
               <a:rPr sz="1300" b="1">
                 <a:solidFill>
-                  <a:srgbClr val="EE7800"/>
+                  <a:srgbClr val="F59B21"/>
                 </a:solidFill>
                 <a:latin typeface="メイリオ"/>
                 <a:ea typeface="メイリオ"/>
@@ -8666,7 +8595,7 @@
             <a:avLst/>
           </a:prstGeom>
           <a:solidFill>
-            <a:srgbClr val="EE7800"/>
+            <a:srgbClr val="F59B21"/>
           </a:solidFill>
           <a:ln>
             <a:noFill/>
@@ -8732,7 +8661,7 @@
           </a:solidFill>
           <a:ln w="12700">
             <a:solidFill>
-              <a:srgbClr val="EE7800"/>
+              <a:srgbClr val="F59B21"/>
             </a:solidFill>
           </a:ln>
           <a:effectLst/>
@@ -8913,7 +8842,7 @@
             <a:r>
               <a:rPr sz="1300" b="1">
                 <a:solidFill>
-                  <a:srgbClr val="EE7800"/>
+                  <a:srgbClr val="F59B21"/>
                 </a:solidFill>
                 <a:latin typeface="メイリオ"/>
                 <a:ea typeface="メイリオ"/>
@@ -8939,7 +8868,7 @@
             <a:avLst/>
           </a:prstGeom>
           <a:solidFill>
-            <a:srgbClr val="FDEEDF"/>
+            <a:srgbClr val="FEF0DE"/>
           </a:solidFill>
           <a:ln>
             <a:noFill/>
@@ -8975,7 +8904,7 @@
             <a:r>
               <a:rPr sz="1500" b="1">
                 <a:solidFill>
-                  <a:srgbClr val="EE7800"/>
+                  <a:srgbClr val="F59B21"/>
                 </a:solidFill>
                 <a:latin typeface="メイリオ"/>
                 <a:ea typeface="メイリオ"/>
@@ -9005,7 +8934,7 @@
           </a:solidFill>
           <a:ln w="12700">
             <a:solidFill>
-              <a:srgbClr val="EE7800"/>
+              <a:srgbClr val="F59B21"/>
             </a:solidFill>
           </a:ln>
           <a:effectLst/>

--- a/20261006_サンクスLINE誘導のご提案_業界別ver1.2.pptx
+++ b/20261006_サンクスLINE誘導のご提案_業界別ver1.2.pptx
@@ -8445,7 +8445,7 @@
             <a:r>
               <a:rPr sz="1300" b="1">
                 <a:solidFill>
-                  <a:srgbClr val="F59B21"/>
+                  <a:srgbClr val="C46A00"/>
                 </a:solidFill>
                 <a:latin typeface="メイリオ"/>
                 <a:ea typeface="メイリオ"/>
@@ -8842,7 +8842,7 @@
             <a:r>
               <a:rPr sz="1300" b="1">
                 <a:solidFill>
-                  <a:srgbClr val="F59B21"/>
+                  <a:srgbClr val="C46A00"/>
                 </a:solidFill>
                 <a:latin typeface="メイリオ"/>
                 <a:ea typeface="メイリオ"/>
@@ -8904,7 +8904,7 @@
             <a:r>
               <a:rPr sz="1500" b="1">
                 <a:solidFill>
-                  <a:srgbClr val="F59B21"/>
+                  <a:srgbClr val="C46A00"/>
                 </a:solidFill>
                 <a:latin typeface="メイリオ"/>
                 <a:ea typeface="メイリオ"/>
